--- a/output/2026dsa_teamx.pptx
+++ b/output/2026dsa_teamx.pptx
@@ -104,7 +104,49 @@
       </a:defRPr>
     </a:lvl9pPr>
   </p:defaultTextStyle>
+  <p:extLst>
+    <p:ext uri="{EFAFB233-063F-42B5-8137-9DF3F51BA10A}">
+      <p15:sldGuideLst xmlns:p15="http://schemas.microsoft.com/office/powerpoint/2012/main"/>
+    </p:ext>
+  </p:extLst>
 </p:presentation>
+</file>
+
+<file path=ppt/changesInfos/changesInfo1.xml><?xml version="1.0" encoding="utf-8"?>
+<pc:chgInfo xmlns:a="http://schemas.openxmlformats.org/drawingml/2006/main" xmlns:r="http://schemas.openxmlformats.org/officeDocument/2006/relationships" xmlns:ac="http://schemas.microsoft.com/office/drawing/2013/main/command" xmlns:pc="http://schemas.microsoft.com/office/powerpoint/2013/main/command">
+  <pc:docChgLst>
+    <pc:chgData name="Kriti Poudel" userId="91d39e71-91ca-4c77-88f4-5461dd531cb9" providerId="ADAL" clId="{A67B9651-4975-4CCA-B4DC-23BED3258845}"/>
+    <pc:docChg chg="custSel modSld">
+      <pc:chgData name="Kriti Poudel" userId="91d39e71-91ca-4c77-88f4-5461dd531cb9" providerId="ADAL" clId="{A67B9651-4975-4CCA-B4DC-23BED3258845}" dt="2026-04-19T00:15:22.570" v="55" actId="20577"/>
+      <pc:docMkLst>
+        <pc:docMk/>
+      </pc:docMkLst>
+      <pc:sldChg chg="modSp mod">
+        <pc:chgData name="Kriti Poudel" userId="91d39e71-91ca-4c77-88f4-5461dd531cb9" providerId="ADAL" clId="{A67B9651-4975-4CCA-B4DC-23BED3258845}" dt="2026-04-19T00:15:22.570" v="55" actId="20577"/>
+        <pc:sldMkLst>
+          <pc:docMk/>
+          <pc:sldMk cId="2610447289" sldId="256"/>
+        </pc:sldMkLst>
+        <pc:spChg chg="mod">
+          <ac:chgData name="Kriti Poudel" userId="91d39e71-91ca-4c77-88f4-5461dd531cb9" providerId="ADAL" clId="{A67B9651-4975-4CCA-B4DC-23BED3258845}" dt="2026-04-19T00:15:04.128" v="48" actId="20577"/>
+          <ac:spMkLst>
+            <pc:docMk/>
+            <pc:sldMk cId="2610447289" sldId="256"/>
+            <ac:spMk id="5" creationId="{8E736061-A4AA-B48C-18BA-DA6B6FB44BF9}"/>
+          </ac:spMkLst>
+        </pc:spChg>
+        <pc:graphicFrameChg chg="modGraphic">
+          <ac:chgData name="Kriti Poudel" userId="91d39e71-91ca-4c77-88f4-5461dd531cb9" providerId="ADAL" clId="{A67B9651-4975-4CCA-B4DC-23BED3258845}" dt="2026-04-19T00:15:22.570" v="55" actId="20577"/>
+          <ac:graphicFrameMkLst>
+            <pc:docMk/>
+            <pc:sldMk cId="2610447289" sldId="256"/>
+            <ac:graphicFrameMk id="8" creationId="{3B7C0BA6-6354-D5DC-430B-E336741F8828}"/>
+          </ac:graphicFrameMkLst>
+        </pc:graphicFrameChg>
+      </pc:sldChg>
+    </pc:docChg>
+  </pc:docChgLst>
+</pc:chgInfo>
 </file>
 
 <file path=ppt/slideLayouts/slideLayout1.xml><?xml version="1.0" encoding="utf-8"?>
@@ -254,7 +296,7 @@
           <a:p>
             <a:fld id="{854E60CA-E60B-3C4A-A6C2-C45FCFAB7068}" type="datetimeFigureOut">
               <a:rPr lang="en-US" smtClean="0"/>
-              <a:t>3/30/26</a:t>
+              <a:t>4/18/2026</a:t>
             </a:fld>
             <a:endParaRPr lang="en-US"/>
           </a:p>
@@ -452,7 +494,7 @@
           <a:p>
             <a:fld id="{854E60CA-E60B-3C4A-A6C2-C45FCFAB7068}" type="datetimeFigureOut">
               <a:rPr lang="en-US" smtClean="0"/>
-              <a:t>3/30/26</a:t>
+              <a:t>4/18/2026</a:t>
             </a:fld>
             <a:endParaRPr lang="en-US"/>
           </a:p>
@@ -660,7 +702,7 @@
           <a:p>
             <a:fld id="{854E60CA-E60B-3C4A-A6C2-C45FCFAB7068}" type="datetimeFigureOut">
               <a:rPr lang="en-US" smtClean="0"/>
-              <a:t>3/30/26</a:t>
+              <a:t>4/18/2026</a:t>
             </a:fld>
             <a:endParaRPr lang="en-US"/>
           </a:p>
@@ -858,7 +900,7 @@
           <a:p>
             <a:fld id="{854E60CA-E60B-3C4A-A6C2-C45FCFAB7068}" type="datetimeFigureOut">
               <a:rPr lang="en-US" smtClean="0"/>
-              <a:t>3/30/26</a:t>
+              <a:t>4/18/2026</a:t>
             </a:fld>
             <a:endParaRPr lang="en-US"/>
           </a:p>
@@ -1133,7 +1175,7 @@
           <a:p>
             <a:fld id="{854E60CA-E60B-3C4A-A6C2-C45FCFAB7068}" type="datetimeFigureOut">
               <a:rPr lang="en-US" smtClean="0"/>
-              <a:t>3/30/26</a:t>
+              <a:t>4/18/2026</a:t>
             </a:fld>
             <a:endParaRPr lang="en-US"/>
           </a:p>
@@ -1398,7 +1440,7 @@
           <a:p>
             <a:fld id="{854E60CA-E60B-3C4A-A6C2-C45FCFAB7068}" type="datetimeFigureOut">
               <a:rPr lang="en-US" smtClean="0"/>
-              <a:t>3/30/26</a:t>
+              <a:t>4/18/2026</a:t>
             </a:fld>
             <a:endParaRPr lang="en-US"/>
           </a:p>
@@ -1810,7 +1852,7 @@
           <a:p>
             <a:fld id="{854E60CA-E60B-3C4A-A6C2-C45FCFAB7068}" type="datetimeFigureOut">
               <a:rPr lang="en-US" smtClean="0"/>
-              <a:t>3/30/26</a:t>
+              <a:t>4/18/2026</a:t>
             </a:fld>
             <a:endParaRPr lang="en-US"/>
           </a:p>
@@ -1951,7 +1993,7 @@
           <a:p>
             <a:fld id="{854E60CA-E60B-3C4A-A6C2-C45FCFAB7068}" type="datetimeFigureOut">
               <a:rPr lang="en-US" smtClean="0"/>
-              <a:t>3/30/26</a:t>
+              <a:t>4/18/2026</a:t>
             </a:fld>
             <a:endParaRPr lang="en-US"/>
           </a:p>
@@ -2064,7 +2106,7 @@
           <a:p>
             <a:fld id="{854E60CA-E60B-3C4A-A6C2-C45FCFAB7068}" type="datetimeFigureOut">
               <a:rPr lang="en-US" smtClean="0"/>
-              <a:t>3/30/26</a:t>
+              <a:t>4/18/2026</a:t>
             </a:fld>
             <a:endParaRPr lang="en-US"/>
           </a:p>
@@ -2375,7 +2417,7 @@
           <a:p>
             <a:fld id="{854E60CA-E60B-3C4A-A6C2-C45FCFAB7068}" type="datetimeFigureOut">
               <a:rPr lang="en-US" smtClean="0"/>
-              <a:t>3/30/26</a:t>
+              <a:t>4/18/2026</a:t>
             </a:fld>
             <a:endParaRPr lang="en-US"/>
           </a:p>
@@ -2663,7 +2705,7 @@
           <a:p>
             <a:fld id="{854E60CA-E60B-3C4A-A6C2-C45FCFAB7068}" type="datetimeFigureOut">
               <a:rPr lang="en-US" smtClean="0"/>
-              <a:t>3/30/26</a:t>
+              <a:t>4/18/2026</a:t>
             </a:fld>
             <a:endParaRPr lang="en-US"/>
           </a:p>
@@ -2904,7 +2946,7 @@
           <a:p>
             <a:fld id="{854E60CA-E60B-3C4A-A6C2-C45FCFAB7068}" type="datetimeFigureOut">
               <a:rPr lang="en-US" smtClean="0"/>
-              <a:t>3/30/26</a:t>
+              <a:t>4/18/2026</a:t>
             </a:fld>
             <a:endParaRPr lang="en-US"/>
           </a:p>
@@ -3386,24 +3428,32 @@
           <a:p>
             <a:pPr algn="ctr"/>
             <a:r>
-              <a:rPr lang="en-US" sz="4000" b="1" u="sng"/>
-              <a:t>Team x</a:t>
-            </a:r>
-            <a:endParaRPr lang="en-US" sz="4000" b="1" u="sng" dirty="0"/>
+              <a:rPr lang="en-US" sz="4000" b="1" u="sng" dirty="0"/>
+              <a:t>Team 7</a:t>
+            </a:r>
           </a:p>
           <a:p>
             <a:pPr algn="ctr"/>
             <a:r>
               <a:rPr lang="en-US" sz="3200" dirty="0"/>
-              <a:t>John Doe</a:t>
+              <a:t>Kriti Poudel</a:t>
             </a:r>
           </a:p>
           <a:p>
             <a:pPr algn="ctr"/>
             <a:r>
+              <a:rPr lang="en-US" sz="3200" dirty="0" err="1"/>
+              <a:t>Mnaduabuchi</a:t>
+            </a:r>
+            <a:r>
               <a:rPr lang="en-US" sz="3200" dirty="0"/>
-              <a:t>Jane Doe</a:t>
-            </a:r>
+              <a:t> </a:t>
+            </a:r>
+            <a:r>
+              <a:rPr lang="en-US" sz="3200" dirty="0" err="1"/>
+              <a:t>Okeh</a:t>
+            </a:r>
+            <a:endParaRPr lang="en-US" sz="3200" dirty="0"/>
           </a:p>
         </p:txBody>
       </p:sp>
@@ -3640,7 +3690,7 @@
           <p:nvPr>
             <p:extLst>
               <p:ext uri="{D42A27DB-BD31-4B8C-83A1-F6EECF244321}">
-                <p14:modId xmlns:p14="http://schemas.microsoft.com/office/powerpoint/2010/main" val="2827846898"/>
+                <p14:modId xmlns:p14="http://schemas.microsoft.com/office/powerpoint/2010/main" val="269449789"/>
               </p:ext>
             </p:extLst>
           </p:nvPr>
@@ -3870,8 +3920,8 @@
                     <a:lstStyle/>
                     <a:p>
                       <a:r>
-                        <a:rPr lang="en-US" sz="2000" dirty="0" err="1"/>
-                        <a:t>strenght_gtex</a:t>
+                        <a:rPr lang="en-US" sz="2000"/>
+                        <a:t>yield</a:t>
                       </a:r>
                       <a:endParaRPr lang="en-US" sz="2000" dirty="0"/>
                     </a:p>

--- a/output/2026dsa_teamx.pptx
+++ b/output/2026dsa_teamx.pptx
@@ -112,17 +112,25 @@
 </p:presentation>
 </file>
 
+<file path=ppt/revisionInfo.xml><?xml version="1.0" encoding="utf-8"?>
+<p1510:revInfo xmlns:a="http://schemas.openxmlformats.org/drawingml/2006/main" xmlns:r="http://schemas.openxmlformats.org/officeDocument/2006/relationships" xmlns:p1510="http://schemas.microsoft.com/office/powerpoint/2015/10/main">
+  <p1510:revLst>
+    <p1510:client id="{63F47D75-02F0-4436-A840-A4007A52CED7}" v="2" dt="2026-04-20T11:24:38.247"/>
+  </p1510:revLst>
+</p1510:revInfo>
+</file>
+
 <file path=ppt/changesInfos/changesInfo1.xml><?xml version="1.0" encoding="utf-8"?>
 <pc:chgInfo xmlns:a="http://schemas.openxmlformats.org/drawingml/2006/main" xmlns:r="http://schemas.openxmlformats.org/officeDocument/2006/relationships" xmlns:ac="http://schemas.microsoft.com/office/drawing/2013/main/command" xmlns:pc="http://schemas.microsoft.com/office/powerpoint/2013/main/command">
   <pc:docChgLst>
     <pc:chgData name="Kriti Poudel" userId="91d39e71-91ca-4c77-88f4-5461dd531cb9" providerId="ADAL" clId="{A67B9651-4975-4CCA-B4DC-23BED3258845}"/>
-    <pc:docChg chg="custSel modSld">
-      <pc:chgData name="Kriti Poudel" userId="91d39e71-91ca-4c77-88f4-5461dd531cb9" providerId="ADAL" clId="{A67B9651-4975-4CCA-B4DC-23BED3258845}" dt="2026-04-19T00:15:22.570" v="55" actId="20577"/>
+    <pc:docChg chg="undo custSel modSld">
+      <pc:chgData name="Kriti Poudel" userId="91d39e71-91ca-4c77-88f4-5461dd531cb9" providerId="ADAL" clId="{A67B9651-4975-4CCA-B4DC-23BED3258845}" dt="2026-04-20T11:24:48.257" v="101" actId="20577"/>
       <pc:docMkLst>
         <pc:docMk/>
       </pc:docMkLst>
       <pc:sldChg chg="modSp mod">
-        <pc:chgData name="Kriti Poudel" userId="91d39e71-91ca-4c77-88f4-5461dd531cb9" providerId="ADAL" clId="{A67B9651-4975-4CCA-B4DC-23BED3258845}" dt="2026-04-19T00:15:22.570" v="55" actId="20577"/>
+        <pc:chgData name="Kriti Poudel" userId="91d39e71-91ca-4c77-88f4-5461dd531cb9" providerId="ADAL" clId="{A67B9651-4975-4CCA-B4DC-23BED3258845}" dt="2026-04-20T11:24:48.257" v="101" actId="20577"/>
         <pc:sldMkLst>
           <pc:docMk/>
           <pc:sldMk cId="2610447289" sldId="256"/>
@@ -136,7 +144,15 @@
           </ac:spMkLst>
         </pc:spChg>
         <pc:graphicFrameChg chg="modGraphic">
-          <ac:chgData name="Kriti Poudel" userId="91d39e71-91ca-4c77-88f4-5461dd531cb9" providerId="ADAL" clId="{A67B9651-4975-4CCA-B4DC-23BED3258845}" dt="2026-04-19T00:15:22.570" v="55" actId="20577"/>
+          <ac:chgData name="Kriti Poudel" userId="91d39e71-91ca-4c77-88f4-5461dd531cb9" providerId="ADAL" clId="{A67B9651-4975-4CCA-B4DC-23BED3258845}" dt="2026-04-20T11:23:29.847" v="60" actId="20577"/>
+          <ac:graphicFrameMkLst>
+            <pc:docMk/>
+            <pc:sldMk cId="2610447289" sldId="256"/>
+            <ac:graphicFrameMk id="6" creationId="{CEE73D54-F153-79B3-B5A0-66E5948D1A2E}"/>
+          </ac:graphicFrameMkLst>
+        </pc:graphicFrameChg>
+        <pc:graphicFrameChg chg="mod modGraphic">
+          <ac:chgData name="Kriti Poudel" userId="91d39e71-91ca-4c77-88f4-5461dd531cb9" providerId="ADAL" clId="{A67B9651-4975-4CCA-B4DC-23BED3258845}" dt="2026-04-20T11:24:48.257" v="101" actId="20577"/>
           <ac:graphicFrameMkLst>
             <pc:docMk/>
             <pc:sldMk cId="2610447289" sldId="256"/>
@@ -296,7 +312,7 @@
           <a:p>
             <a:fld id="{854E60CA-E60B-3C4A-A6C2-C45FCFAB7068}" type="datetimeFigureOut">
               <a:rPr lang="en-US" smtClean="0"/>
-              <a:t>4/18/2026</a:t>
+              <a:t>4/20/2026</a:t>
             </a:fld>
             <a:endParaRPr lang="en-US"/>
           </a:p>
@@ -494,7 +510,7 @@
           <a:p>
             <a:fld id="{854E60CA-E60B-3C4A-A6C2-C45FCFAB7068}" type="datetimeFigureOut">
               <a:rPr lang="en-US" smtClean="0"/>
-              <a:t>4/18/2026</a:t>
+              <a:t>4/20/2026</a:t>
             </a:fld>
             <a:endParaRPr lang="en-US"/>
           </a:p>
@@ -702,7 +718,7 @@
           <a:p>
             <a:fld id="{854E60CA-E60B-3C4A-A6C2-C45FCFAB7068}" type="datetimeFigureOut">
               <a:rPr lang="en-US" smtClean="0"/>
-              <a:t>4/18/2026</a:t>
+              <a:t>4/20/2026</a:t>
             </a:fld>
             <a:endParaRPr lang="en-US"/>
           </a:p>
@@ -900,7 +916,7 @@
           <a:p>
             <a:fld id="{854E60CA-E60B-3C4A-A6C2-C45FCFAB7068}" type="datetimeFigureOut">
               <a:rPr lang="en-US" smtClean="0"/>
-              <a:t>4/18/2026</a:t>
+              <a:t>4/20/2026</a:t>
             </a:fld>
             <a:endParaRPr lang="en-US"/>
           </a:p>
@@ -1175,7 +1191,7 @@
           <a:p>
             <a:fld id="{854E60CA-E60B-3C4A-A6C2-C45FCFAB7068}" type="datetimeFigureOut">
               <a:rPr lang="en-US" smtClean="0"/>
-              <a:t>4/18/2026</a:t>
+              <a:t>4/20/2026</a:t>
             </a:fld>
             <a:endParaRPr lang="en-US"/>
           </a:p>
@@ -1440,7 +1456,7 @@
           <a:p>
             <a:fld id="{854E60CA-E60B-3C4A-A6C2-C45FCFAB7068}" type="datetimeFigureOut">
               <a:rPr lang="en-US" smtClean="0"/>
-              <a:t>4/18/2026</a:t>
+              <a:t>4/20/2026</a:t>
             </a:fld>
             <a:endParaRPr lang="en-US"/>
           </a:p>
@@ -1852,7 +1868,7 @@
           <a:p>
             <a:fld id="{854E60CA-E60B-3C4A-A6C2-C45FCFAB7068}" type="datetimeFigureOut">
               <a:rPr lang="en-US" smtClean="0"/>
-              <a:t>4/18/2026</a:t>
+              <a:t>4/20/2026</a:t>
             </a:fld>
             <a:endParaRPr lang="en-US"/>
           </a:p>
@@ -1993,7 +2009,7 @@
           <a:p>
             <a:fld id="{854E60CA-E60B-3C4A-A6C2-C45FCFAB7068}" type="datetimeFigureOut">
               <a:rPr lang="en-US" smtClean="0"/>
-              <a:t>4/18/2026</a:t>
+              <a:t>4/20/2026</a:t>
             </a:fld>
             <a:endParaRPr lang="en-US"/>
           </a:p>
@@ -2106,7 +2122,7 @@
           <a:p>
             <a:fld id="{854E60CA-E60B-3C4A-A6C2-C45FCFAB7068}" type="datetimeFigureOut">
               <a:rPr lang="en-US" smtClean="0"/>
-              <a:t>4/18/2026</a:t>
+              <a:t>4/20/2026</a:t>
             </a:fld>
             <a:endParaRPr lang="en-US"/>
           </a:p>
@@ -2417,7 +2433,7 @@
           <a:p>
             <a:fld id="{854E60CA-E60B-3C4A-A6C2-C45FCFAB7068}" type="datetimeFigureOut">
               <a:rPr lang="en-US" smtClean="0"/>
-              <a:t>4/18/2026</a:t>
+              <a:t>4/20/2026</a:t>
             </a:fld>
             <a:endParaRPr lang="en-US"/>
           </a:p>
@@ -2705,7 +2721,7 @@
           <a:p>
             <a:fld id="{854E60CA-E60B-3C4A-A6C2-C45FCFAB7068}" type="datetimeFigureOut">
               <a:rPr lang="en-US" smtClean="0"/>
-              <a:t>4/18/2026</a:t>
+              <a:t>4/20/2026</a:t>
             </a:fld>
             <a:endParaRPr lang="en-US"/>
           </a:p>
@@ -2946,7 +2962,7 @@
           <a:p>
             <a:fld id="{854E60CA-E60B-3C4A-A6C2-C45FCFAB7068}" type="datetimeFigureOut">
               <a:rPr lang="en-US" smtClean="0"/>
-              <a:t>4/18/2026</a:t>
+              <a:t>4/20/2026</a:t>
             </a:fld>
             <a:endParaRPr lang="en-US"/>
           </a:p>
@@ -3472,7 +3488,7 @@
           <p:nvPr>
             <p:extLst>
               <p:ext uri="{D42A27DB-BD31-4B8C-83A1-F6EECF244321}">
-                <p14:modId xmlns:p14="http://schemas.microsoft.com/office/powerpoint/2010/main" val="4253389279"/>
+                <p14:modId xmlns:p14="http://schemas.microsoft.com/office/powerpoint/2010/main" val="1033273424"/>
               </p:ext>
             </p:extLst>
           </p:nvPr>
@@ -3631,10 +3647,9 @@
                     <a:lstStyle/>
                     <a:p>
                       <a:r>
-                        <a:rPr lang="en-US" sz="2400" dirty="0" err="1"/>
-                        <a:t>Othermodel</a:t>
+                        <a:rPr lang="en-US" sz="2400" dirty="0"/>
+                        <a:t>SVM</a:t>
                       </a:r>
-                      <a:endParaRPr lang="en-US" sz="2400" dirty="0"/>
                     </a:p>
                   </a:txBody>
                   <a:tcPr/>
@@ -3690,7 +3705,7 @@
           <p:nvPr>
             <p:extLst>
               <p:ext uri="{D42A27DB-BD31-4B8C-83A1-F6EECF244321}">
-                <p14:modId xmlns:p14="http://schemas.microsoft.com/office/powerpoint/2010/main" val="269449789"/>
+                <p14:modId xmlns:p14="http://schemas.microsoft.com/office/powerpoint/2010/main" val="1078313119"/>
               </p:ext>
             </p:extLst>
           </p:nvPr>
@@ -3822,7 +3837,7 @@
                     <a:p>
                       <a:r>
                         <a:rPr lang="en-US" sz="2000" dirty="0"/>
-                        <a:t>72</a:t>
+                        <a:t>76</a:t>
                       </a:r>
                     </a:p>
                   </a:txBody>
@@ -3920,10 +3935,9 @@
                     <a:lstStyle/>
                     <a:p>
                       <a:r>
-                        <a:rPr lang="en-US" sz="2000"/>
-                        <a:t>yield</a:t>
+                        <a:rPr lang="en-US" sz="2000" dirty="0"/>
+                        <a:t>Yield in mg ha-1</a:t>
                       </a:r>
-                      <a:endParaRPr lang="en-US" sz="2000" dirty="0"/>
                     </a:p>
                   </a:txBody>
                   <a:tcPr/>
@@ -3995,7 +4009,7 @@
                         <a:t>, </a:t>
                       </a:r>
                       <a:r>
-                        <a:rPr lang="en-US" sz="2000" dirty="0" err="1"/>
+                        <a:rPr lang="en-US" sz="2000"/>
                         <a:t>ntrees</a:t>
                       </a:r>
                       <a:endParaRPr lang="en-US" sz="2000" dirty="0"/>

--- a/output/2026dsa_teamx.pptx
+++ b/output/2026dsa_teamx.pptx
@@ -112,16 +112,48 @@
 </p:presentation>
 </file>
 
-<file path=ppt/revisionInfo.xml><?xml version="1.0" encoding="utf-8"?>
-<p1510:revInfo xmlns:a="http://schemas.openxmlformats.org/drawingml/2006/main" xmlns:r="http://schemas.openxmlformats.org/officeDocument/2006/relationships" xmlns:p1510="http://schemas.microsoft.com/office/powerpoint/2015/10/main">
-  <p1510:revLst>
-    <p1510:client id="{63F47D75-02F0-4436-A840-A4007A52CED7}" v="2" dt="2026-04-20T11:24:38.247"/>
-  </p1510:revLst>
-</p1510:revInfo>
-</file>
-
 <file path=ppt/changesInfos/changesInfo1.xml><?xml version="1.0" encoding="utf-8"?>
 <pc:chgInfo xmlns:a="http://schemas.openxmlformats.org/drawingml/2006/main" xmlns:r="http://schemas.openxmlformats.org/officeDocument/2006/relationships" xmlns:ac="http://schemas.microsoft.com/office/drawing/2013/main/command" xmlns:pc="http://schemas.microsoft.com/office/powerpoint/2013/main/command">
+  <pc:docChgLst>
+    <pc:chgData name="Mmaduabuchi Okeh" userId="89a7889b-1da7-453d-8605-3f43aeefa5d1" providerId="ADAL" clId="{24CFD5F6-33BE-5568-9D63-7161E94CAB73}"/>
+    <pc:docChg chg="custSel modSld">
+      <pc:chgData name="Mmaduabuchi Okeh" userId="89a7889b-1da7-453d-8605-3f43aeefa5d1" providerId="ADAL" clId="{24CFD5F6-33BE-5568-9D63-7161E94CAB73}" dt="2026-04-29T15:29:56.316" v="226" actId="1037"/>
+      <pc:docMkLst>
+        <pc:docMk/>
+      </pc:docMkLst>
+      <pc:sldChg chg="modSp mod">
+        <pc:chgData name="Mmaduabuchi Okeh" userId="89a7889b-1da7-453d-8605-3f43aeefa5d1" providerId="ADAL" clId="{24CFD5F6-33BE-5568-9D63-7161E94CAB73}" dt="2026-04-29T15:29:56.316" v="226" actId="1037"/>
+        <pc:sldMkLst>
+          <pc:docMk/>
+          <pc:sldMk cId="2610447289" sldId="256"/>
+        </pc:sldMkLst>
+        <pc:spChg chg="mod">
+          <ac:chgData name="Mmaduabuchi Okeh" userId="89a7889b-1da7-453d-8605-3f43aeefa5d1" providerId="ADAL" clId="{24CFD5F6-33BE-5568-9D63-7161E94CAB73}" dt="2026-04-29T15:29:56.316" v="226" actId="1037"/>
+          <ac:spMkLst>
+            <pc:docMk/>
+            <pc:sldMk cId="2610447289" sldId="256"/>
+            <ac:spMk id="10" creationId="{C8B5BC3C-B1E0-FC52-37D1-7C19A3D4BDD4}"/>
+          </ac:spMkLst>
+        </pc:spChg>
+        <pc:graphicFrameChg chg="modGraphic">
+          <ac:chgData name="Mmaduabuchi Okeh" userId="89a7889b-1da7-453d-8605-3f43aeefa5d1" providerId="ADAL" clId="{24CFD5F6-33BE-5568-9D63-7161E94CAB73}" dt="2026-04-29T15:16:07.942" v="9" actId="20577"/>
+          <ac:graphicFrameMkLst>
+            <pc:docMk/>
+            <pc:sldMk cId="2610447289" sldId="256"/>
+            <ac:graphicFrameMk id="6" creationId="{CEE73D54-F153-79B3-B5A0-66E5948D1A2E}"/>
+          </ac:graphicFrameMkLst>
+        </pc:graphicFrameChg>
+        <pc:graphicFrameChg chg="mod modGraphic">
+          <ac:chgData name="Mmaduabuchi Okeh" userId="89a7889b-1da7-453d-8605-3f43aeefa5d1" providerId="ADAL" clId="{24CFD5F6-33BE-5568-9D63-7161E94CAB73}" dt="2026-04-29T15:29:51.481" v="212" actId="1035"/>
+          <ac:graphicFrameMkLst>
+            <pc:docMk/>
+            <pc:sldMk cId="2610447289" sldId="256"/>
+            <ac:graphicFrameMk id="8" creationId="{3B7C0BA6-6354-D5DC-430B-E336741F8828}"/>
+          </ac:graphicFrameMkLst>
+        </pc:graphicFrameChg>
+      </pc:sldChg>
+    </pc:docChg>
+  </pc:docChgLst>
   <pc:docChgLst>
     <pc:chgData name="Kriti Poudel" userId="91d39e71-91ca-4c77-88f4-5461dd531cb9" providerId="ADAL" clId="{A67B9651-4975-4CCA-B4DC-23BED3258845}"/>
     <pc:docChg chg="undo custSel modSld">
@@ -312,7 +344,7 @@
           <a:p>
             <a:fld id="{854E60CA-E60B-3C4A-A6C2-C45FCFAB7068}" type="datetimeFigureOut">
               <a:rPr lang="en-US" smtClean="0"/>
-              <a:t>4/20/2026</a:t>
+              <a:t>4/29/26</a:t>
             </a:fld>
             <a:endParaRPr lang="en-US"/>
           </a:p>
@@ -510,7 +542,7 @@
           <a:p>
             <a:fld id="{854E60CA-E60B-3C4A-A6C2-C45FCFAB7068}" type="datetimeFigureOut">
               <a:rPr lang="en-US" smtClean="0"/>
-              <a:t>4/20/2026</a:t>
+              <a:t>4/29/26</a:t>
             </a:fld>
             <a:endParaRPr lang="en-US"/>
           </a:p>
@@ -718,7 +750,7 @@
           <a:p>
             <a:fld id="{854E60CA-E60B-3C4A-A6C2-C45FCFAB7068}" type="datetimeFigureOut">
               <a:rPr lang="en-US" smtClean="0"/>
-              <a:t>4/20/2026</a:t>
+              <a:t>4/29/26</a:t>
             </a:fld>
             <a:endParaRPr lang="en-US"/>
           </a:p>
@@ -916,7 +948,7 @@
           <a:p>
             <a:fld id="{854E60CA-E60B-3C4A-A6C2-C45FCFAB7068}" type="datetimeFigureOut">
               <a:rPr lang="en-US" smtClean="0"/>
-              <a:t>4/20/2026</a:t>
+              <a:t>4/29/26</a:t>
             </a:fld>
             <a:endParaRPr lang="en-US"/>
           </a:p>
@@ -1191,7 +1223,7 @@
           <a:p>
             <a:fld id="{854E60CA-E60B-3C4A-A6C2-C45FCFAB7068}" type="datetimeFigureOut">
               <a:rPr lang="en-US" smtClean="0"/>
-              <a:t>4/20/2026</a:t>
+              <a:t>4/29/26</a:t>
             </a:fld>
             <a:endParaRPr lang="en-US"/>
           </a:p>
@@ -1456,7 +1488,7 @@
           <a:p>
             <a:fld id="{854E60CA-E60B-3C4A-A6C2-C45FCFAB7068}" type="datetimeFigureOut">
               <a:rPr lang="en-US" smtClean="0"/>
-              <a:t>4/20/2026</a:t>
+              <a:t>4/29/26</a:t>
             </a:fld>
             <a:endParaRPr lang="en-US"/>
           </a:p>
@@ -1868,7 +1900,7 @@
           <a:p>
             <a:fld id="{854E60CA-E60B-3C4A-A6C2-C45FCFAB7068}" type="datetimeFigureOut">
               <a:rPr lang="en-US" smtClean="0"/>
-              <a:t>4/20/2026</a:t>
+              <a:t>4/29/26</a:t>
             </a:fld>
             <a:endParaRPr lang="en-US"/>
           </a:p>
@@ -2009,7 +2041,7 @@
           <a:p>
             <a:fld id="{854E60CA-E60B-3C4A-A6C2-C45FCFAB7068}" type="datetimeFigureOut">
               <a:rPr lang="en-US" smtClean="0"/>
-              <a:t>4/20/2026</a:t>
+              <a:t>4/29/26</a:t>
             </a:fld>
             <a:endParaRPr lang="en-US"/>
           </a:p>
@@ -2122,7 +2154,7 @@
           <a:p>
             <a:fld id="{854E60CA-E60B-3C4A-A6C2-C45FCFAB7068}" type="datetimeFigureOut">
               <a:rPr lang="en-US" smtClean="0"/>
-              <a:t>4/20/2026</a:t>
+              <a:t>4/29/26</a:t>
             </a:fld>
             <a:endParaRPr lang="en-US"/>
           </a:p>
@@ -2433,7 +2465,7 @@
           <a:p>
             <a:fld id="{854E60CA-E60B-3C4A-A6C2-C45FCFAB7068}" type="datetimeFigureOut">
               <a:rPr lang="en-US" smtClean="0"/>
-              <a:t>4/20/2026</a:t>
+              <a:t>4/29/26</a:t>
             </a:fld>
             <a:endParaRPr lang="en-US"/>
           </a:p>
@@ -2721,7 +2753,7 @@
           <a:p>
             <a:fld id="{854E60CA-E60B-3C4A-A6C2-C45FCFAB7068}" type="datetimeFigureOut">
               <a:rPr lang="en-US" smtClean="0"/>
-              <a:t>4/20/2026</a:t>
+              <a:t>4/29/26</a:t>
             </a:fld>
             <a:endParaRPr lang="en-US"/>
           </a:p>
@@ -2962,7 +2994,7 @@
           <a:p>
             <a:fld id="{854E60CA-E60B-3C4A-A6C2-C45FCFAB7068}" type="datetimeFigureOut">
               <a:rPr lang="en-US" smtClean="0"/>
-              <a:t>4/20/2026</a:t>
+              <a:t>4/29/26</a:t>
             </a:fld>
             <a:endParaRPr lang="en-US"/>
           </a:p>
@@ -3488,7 +3520,7 @@
           <p:nvPr>
             <p:extLst>
               <p:ext uri="{D42A27DB-BD31-4B8C-83A1-F6EECF244321}">
-                <p14:modId xmlns:p14="http://schemas.microsoft.com/office/powerpoint/2010/main" val="1033273424"/>
+                <p14:modId xmlns:p14="http://schemas.microsoft.com/office/powerpoint/2010/main" val="3169851725"/>
               </p:ext>
             </p:extLst>
           </p:nvPr>
@@ -3615,7 +3647,7 @@
                     <a:p>
                       <a:r>
                         <a:rPr lang="en-US" sz="2400" dirty="0"/>
-                        <a:t>0.4</a:t>
+                        <a:t>0.542</a:t>
                       </a:r>
                     </a:p>
                   </a:txBody>
@@ -3628,7 +3660,7 @@
                     <a:p>
                       <a:r>
                         <a:rPr lang="en-US" sz="2400" dirty="0"/>
-                        <a:t>2</a:t>
+                        <a:t>2.106</a:t>
                       </a:r>
                     </a:p>
                   </a:txBody>
@@ -3705,14 +3737,14 @@
           <p:nvPr>
             <p:extLst>
               <p:ext uri="{D42A27DB-BD31-4B8C-83A1-F6EECF244321}">
-                <p14:modId xmlns:p14="http://schemas.microsoft.com/office/powerpoint/2010/main" val="1078313119"/>
+                <p14:modId xmlns:p14="http://schemas.microsoft.com/office/powerpoint/2010/main" val="4139564810"/>
               </p:ext>
             </p:extLst>
           </p:nvPr>
         </p:nvGraphicFramePr>
         <p:xfrm>
-          <a:off x="5514417" y="1466415"/>
-          <a:ext cx="6118606" cy="4754880"/>
+          <a:off x="5514417" y="1254546"/>
+          <a:ext cx="6027095" cy="5547360"/>
         </p:xfrm>
         <a:graphic>
           <a:graphicData uri="http://schemas.openxmlformats.org/drawingml/2006/table">
@@ -3721,14 +3753,14 @@
                 <a:tableStyleId>{5C22544A-7EE6-4342-B048-85BDC9FD1C3A}</a:tableStyleId>
               </a:tblPr>
               <a:tblGrid>
-                <a:gridCol w="3804412">
+                <a:gridCol w="3747513">
                   <a:extLst>
                     <a:ext uri="{9D8B030D-6E8A-4147-A177-3AD203B41FA5}">
                       <a16:colId xmlns:a16="http://schemas.microsoft.com/office/drawing/2014/main" val="3216603500"/>
                     </a:ext>
                   </a:extLst>
                 </a:gridCol>
-                <a:gridCol w="2314194">
+                <a:gridCol w="2279582">
                   <a:extLst>
                     <a:ext uri="{9D8B030D-6E8A-4147-A177-3AD203B41FA5}">
                       <a16:colId xmlns:a16="http://schemas.microsoft.com/office/drawing/2014/main" val="1378441649"/>
@@ -3736,7 +3768,7 @@
                   </a:extLst>
                 </a:gridCol>
               </a:tblGrid>
-              <a:tr h="370840">
+              <a:tr h="357831">
                 <a:tc>
                   <a:txBody>
                     <a:bodyPr/>
@@ -3783,7 +3815,7 @@
                   </a:ext>
                 </a:extLst>
               </a:tr>
-              <a:tr h="370840">
+              <a:tr h="357831">
                 <a:tc>
                   <a:txBody>
                     <a:bodyPr/>
@@ -3816,7 +3848,7 @@
                   </a:ext>
                 </a:extLst>
               </a:tr>
-              <a:tr h="370840">
+              <a:tr h="357831">
                 <a:tc>
                   <a:txBody>
                     <a:bodyPr/>
@@ -3849,7 +3881,7 @@
                   </a:ext>
                 </a:extLst>
               </a:tr>
-              <a:tr h="370840">
+              <a:tr h="357831">
                 <a:tc>
                   <a:txBody>
                     <a:bodyPr/>
@@ -3882,7 +3914,7 @@
                   </a:ext>
                 </a:extLst>
               </a:tr>
-              <a:tr h="370840">
+              <a:tr h="357831">
                 <a:tc>
                   <a:txBody>
                     <a:bodyPr/>
@@ -3915,7 +3947,7 @@
                   </a:ext>
                 </a:extLst>
               </a:tr>
-              <a:tr h="370840">
+              <a:tr h="357831">
                 <a:tc>
                   <a:txBody>
                     <a:bodyPr/>
@@ -3948,7 +3980,7 @@
                   </a:ext>
                 </a:extLst>
               </a:tr>
-              <a:tr h="370840">
+              <a:tr h="538574">
                 <a:tc>
                   <a:txBody>
                     <a:bodyPr/>
@@ -3968,8 +4000,8 @@
                     <a:lstStyle/>
                     <a:p>
                       <a:r>
-                        <a:rPr lang="en-US" sz="2000" dirty="0"/>
-                        <a:t>Normalized, PCA</a:t>
+                        <a:rPr lang="en-US" sz="1600" dirty="0"/>
+                        <a:t>Removed non-growing season months</a:t>
                       </a:r>
                     </a:p>
                   </a:txBody>
@@ -3981,7 +4013,7 @@
                   </a:ext>
                 </a:extLst>
               </a:tr>
-              <a:tr h="370840">
+              <a:tr h="633086">
                 <a:tc>
                   <a:txBody>
                     <a:bodyPr/>
@@ -4001,16 +4033,28 @@
                     <a:lstStyle/>
                     <a:p>
                       <a:r>
+                        <a:rPr lang="en-US" sz="2000" dirty="0"/>
+                        <a:t>Trees, </a:t>
+                      </a:r>
+                      <a:r>
                         <a:rPr lang="en-US" sz="2000" dirty="0" err="1"/>
-                        <a:t>Mtry</a:t>
+                        <a:t>tree_depth</a:t>
                       </a:r>
                       <a:r>
                         <a:rPr lang="en-US" sz="2000" dirty="0"/>
                         <a:t>, </a:t>
                       </a:r>
                       <a:r>
-                        <a:rPr lang="en-US" sz="2000"/>
-                        <a:t>ntrees</a:t>
+                        <a:rPr lang="en-US" sz="2000" dirty="0" err="1"/>
+                        <a:t>min_n</a:t>
+                      </a:r>
+                      <a:r>
+                        <a:rPr lang="en-US" sz="2000" dirty="0"/>
+                        <a:t>, </a:t>
+                      </a:r>
+                      <a:r>
+                        <a:rPr lang="en-US" sz="2000" dirty="0" err="1"/>
+                        <a:t>learn_rate</a:t>
                       </a:r>
                       <a:endParaRPr lang="en-US" sz="2000" dirty="0"/>
                     </a:p>
@@ -4023,7 +4067,7 @@
                   </a:ext>
                 </a:extLst>
               </a:tr>
-              <a:tr h="370840">
+              <a:tr h="357831">
                 <a:tc>
                   <a:txBody>
                     <a:bodyPr/>
@@ -4044,7 +4088,7 @@
                     <a:p>
                       <a:r>
                         <a:rPr lang="en-US" sz="2000" dirty="0"/>
-                        <a:t>Sim. annealing</a:t>
+                        <a:t>ANOVA Racing</a:t>
                       </a:r>
                     </a:p>
                   </a:txBody>
@@ -4056,7 +4100,7 @@
                   </a:ext>
                 </a:extLst>
               </a:tr>
-              <a:tr h="370840">
+              <a:tr h="357831">
                 <a:tc>
                   <a:txBody>
                     <a:bodyPr/>
@@ -4077,7 +4121,7 @@
                     <a:p>
                       <a:r>
                         <a:rPr lang="en-US" sz="2000" dirty="0"/>
-                        <a:t>5</a:t>
+                        <a:t>10</a:t>
                       </a:r>
                     </a:p>
                   </a:txBody>
@@ -4089,7 +4133,7 @@
                   </a:ext>
                 </a:extLst>
               </a:tr>
-              <a:tr h="370840">
+              <a:tr h="357831">
                 <a:tc>
                   <a:txBody>
                     <a:bodyPr/>
@@ -4122,7 +4166,7 @@
                   </a:ext>
                 </a:extLst>
               </a:tr>
-              <a:tr h="370840">
+              <a:tr h="357831">
                 <a:tc>
                   <a:txBody>
                     <a:bodyPr/>
@@ -4222,7 +4266,7 @@
         </p:nvSpPr>
         <p:spPr>
           <a:xfrm>
-            <a:off x="5514417" y="815601"/>
+            <a:off x="5492115" y="681789"/>
             <a:ext cx="6118606" cy="461665"/>
           </a:xfrm>
           <a:prstGeom prst="rect">
